--- a/sunriseRobot/app_SunriseRobot/info/joystick_key_map.pptx
+++ b/sunriseRobot/app_SunriseRobot/info/joystick_key_map.pptx
@@ -264,7 +264,7 @@
           <a:p>
             <a:fld id="{60B78028-44F6-416E-B0AB-FAA3EA91683A}" type="datetimeFigureOut">
               <a:rPr lang="en-US" smtClean="0"/>
-              <a:t>5/24/2025</a:t>
+              <a:t>8/25/2025</a:t>
             </a:fld>
             <a:endParaRPr lang="en-US"/>
           </a:p>
@@ -462,7 +462,7 @@
           <a:p>
             <a:fld id="{60B78028-44F6-416E-B0AB-FAA3EA91683A}" type="datetimeFigureOut">
               <a:rPr lang="en-US" smtClean="0"/>
-              <a:t>5/24/2025</a:t>
+              <a:t>8/25/2025</a:t>
             </a:fld>
             <a:endParaRPr lang="en-US"/>
           </a:p>
@@ -670,7 +670,7 @@
           <a:p>
             <a:fld id="{60B78028-44F6-416E-B0AB-FAA3EA91683A}" type="datetimeFigureOut">
               <a:rPr lang="en-US" smtClean="0"/>
-              <a:t>5/24/2025</a:t>
+              <a:t>8/25/2025</a:t>
             </a:fld>
             <a:endParaRPr lang="en-US"/>
           </a:p>
@@ -868,7 +868,7 @@
           <a:p>
             <a:fld id="{60B78028-44F6-416E-B0AB-FAA3EA91683A}" type="datetimeFigureOut">
               <a:rPr lang="en-US" smtClean="0"/>
-              <a:t>5/24/2025</a:t>
+              <a:t>8/25/2025</a:t>
             </a:fld>
             <a:endParaRPr lang="en-US"/>
           </a:p>
@@ -1143,7 +1143,7 @@
           <a:p>
             <a:fld id="{60B78028-44F6-416E-B0AB-FAA3EA91683A}" type="datetimeFigureOut">
               <a:rPr lang="en-US" smtClean="0"/>
-              <a:t>5/24/2025</a:t>
+              <a:t>8/25/2025</a:t>
             </a:fld>
             <a:endParaRPr lang="en-US"/>
           </a:p>
@@ -1408,7 +1408,7 @@
           <a:p>
             <a:fld id="{60B78028-44F6-416E-B0AB-FAA3EA91683A}" type="datetimeFigureOut">
               <a:rPr lang="en-US" smtClean="0"/>
-              <a:t>5/24/2025</a:t>
+              <a:t>8/25/2025</a:t>
             </a:fld>
             <a:endParaRPr lang="en-US"/>
           </a:p>
@@ -1820,7 +1820,7 @@
           <a:p>
             <a:fld id="{60B78028-44F6-416E-B0AB-FAA3EA91683A}" type="datetimeFigureOut">
               <a:rPr lang="en-US" smtClean="0"/>
-              <a:t>5/24/2025</a:t>
+              <a:t>8/25/2025</a:t>
             </a:fld>
             <a:endParaRPr lang="en-US"/>
           </a:p>
@@ -1961,7 +1961,7 @@
           <a:p>
             <a:fld id="{60B78028-44F6-416E-B0AB-FAA3EA91683A}" type="datetimeFigureOut">
               <a:rPr lang="en-US" smtClean="0"/>
-              <a:t>5/24/2025</a:t>
+              <a:t>8/25/2025</a:t>
             </a:fld>
             <a:endParaRPr lang="en-US"/>
           </a:p>
@@ -2074,7 +2074,7 @@
           <a:p>
             <a:fld id="{60B78028-44F6-416E-B0AB-FAA3EA91683A}" type="datetimeFigureOut">
               <a:rPr lang="en-US" smtClean="0"/>
-              <a:t>5/24/2025</a:t>
+              <a:t>8/25/2025</a:t>
             </a:fld>
             <a:endParaRPr lang="en-US"/>
           </a:p>
@@ -2385,7 +2385,7 @@
           <a:p>
             <a:fld id="{60B78028-44F6-416E-B0AB-FAA3EA91683A}" type="datetimeFigureOut">
               <a:rPr lang="en-US" smtClean="0"/>
-              <a:t>5/24/2025</a:t>
+              <a:t>8/25/2025</a:t>
             </a:fld>
             <a:endParaRPr lang="en-US"/>
           </a:p>
@@ -2673,7 +2673,7 @@
           <a:p>
             <a:fld id="{60B78028-44F6-416E-B0AB-FAA3EA91683A}" type="datetimeFigureOut">
               <a:rPr lang="en-US" smtClean="0"/>
-              <a:t>5/24/2025</a:t>
+              <a:t>8/25/2025</a:t>
             </a:fld>
             <a:endParaRPr lang="en-US"/>
           </a:p>
@@ -2914,7 +2914,7 @@
           <a:p>
             <a:fld id="{60B78028-44F6-416E-B0AB-FAA3EA91683A}" type="datetimeFigureOut">
               <a:rPr lang="en-US" smtClean="0"/>
-              <a:t>5/24/2025</a:t>
+              <a:t>8/25/2025</a:t>
             </a:fld>
             <a:endParaRPr lang="en-US"/>
           </a:p>
@@ -5435,7 +5435,7 @@
           <a:noFill/>
           <a:ln w="28575">
             <a:solidFill>
-              <a:srgbClr val="FF0000"/>
+              <a:srgbClr val="00B0F0"/>
             </a:solidFill>
           </a:ln>
         </p:spPr>
@@ -5496,7 +5496,7 @@
           </a:prstGeom>
           <a:ln w="19050">
             <a:solidFill>
-              <a:srgbClr val="FF0000"/>
+              <a:srgbClr val="00B0F0"/>
             </a:solidFill>
             <a:tailEnd type="triangle"/>
           </a:ln>
@@ -5586,7 +5586,7 @@
           </a:prstGeom>
           <a:ln w="57150">
             <a:solidFill>
-              <a:srgbClr val="FF0000"/>
+              <a:srgbClr val="00B0F0"/>
             </a:solidFill>
             <a:prstDash val="sysDot"/>
             <a:headEnd type="triangle"/>
@@ -5632,7 +5632,7 @@
           </a:prstGeom>
           <a:ln w="57150">
             <a:solidFill>
-              <a:srgbClr val="00B0F0"/>
+              <a:srgbClr val="FF0000"/>
             </a:solidFill>
             <a:prstDash val="sysDot"/>
             <a:headEnd type="triangle"/>
@@ -5819,7 +5819,7 @@
         </p:nvSpPr>
         <p:spPr>
           <a:xfrm>
-            <a:off x="7071639" y="6083163"/>
+            <a:off x="4771373" y="645551"/>
             <a:ext cx="1687706" cy="646331"/>
           </a:xfrm>
           <a:prstGeom prst="rect">
@@ -5933,14 +5933,14 @@
           </p:cNvPr>
           <p:cNvCxnSpPr>
             <a:cxnSpLocks/>
-            <a:stCxn id="42" idx="0"/>
+            <a:stCxn id="42" idx="2"/>
           </p:cNvCxnSpPr>
           <p:nvPr/>
         </p:nvCxnSpPr>
         <p:spPr>
-          <a:xfrm flipH="1" flipV="1">
-            <a:off x="6810375" y="4629150"/>
-            <a:ext cx="1105117" cy="1454013"/>
+          <a:xfrm>
+            <a:off x="5615226" y="1291882"/>
+            <a:ext cx="1821400" cy="388671"/>
           </a:xfrm>
           <a:prstGeom prst="straightConnector1">
             <a:avLst/>
@@ -6095,7 +6095,7 @@
           </a:prstGeom>
           <a:ln w="19050">
             <a:solidFill>
-              <a:srgbClr val="FF0000"/>
+              <a:srgbClr val="00B0F0"/>
             </a:solidFill>
             <a:tailEnd type="triangle"/>
           </a:ln>
@@ -6138,7 +6138,7 @@
           <a:noFill/>
           <a:ln w="28575">
             <a:solidFill>
-              <a:srgbClr val="00B0F0"/>
+              <a:srgbClr val="FF0000"/>
             </a:solidFill>
           </a:ln>
         </p:spPr>
@@ -6198,7 +6198,7 @@
           </a:prstGeom>
           <a:ln w="19050">
             <a:solidFill>
-              <a:srgbClr val="00B0F0"/>
+              <a:srgbClr val="FF0000"/>
             </a:solidFill>
             <a:tailEnd type="triangle"/>
           </a:ln>
@@ -6243,54 +6243,8 @@
           </a:prstGeom>
           <a:ln w="19050">
             <a:solidFill>
-              <a:srgbClr val="00B0F0"/>
-            </a:solidFill>
-            <a:tailEnd type="triangle"/>
-          </a:ln>
-        </p:spPr>
-        <p:style>
-          <a:lnRef idx="2">
-            <a:schemeClr val="accent1"/>
-          </a:lnRef>
-          <a:fillRef idx="0">
-            <a:schemeClr val="accent1"/>
-          </a:fillRef>
-          <a:effectRef idx="1">
-            <a:schemeClr val="accent1"/>
-          </a:effectRef>
-          <a:fontRef idx="minor">
-            <a:schemeClr val="tx1"/>
-          </a:fontRef>
-        </p:style>
-      </p:cxnSp>
-      <p:cxnSp>
-        <p:nvCxnSpPr>
-          <p:cNvPr id="62" name="Straight Arrow Connector 61">
-            <a:extLst>
-              <a:ext uri="{FF2B5EF4-FFF2-40B4-BE49-F238E27FC236}">
-                <a16:creationId xmlns:a16="http://schemas.microsoft.com/office/drawing/2014/main" id="{710A5369-4307-802C-EE90-AFD1B03FA3E4}"/>
-              </a:ext>
-            </a:extLst>
-          </p:cNvPr>
-          <p:cNvCxnSpPr>
-            <a:cxnSpLocks/>
-          </p:cNvCxnSpPr>
-          <p:nvPr/>
-        </p:nvCxnSpPr>
-        <p:spPr>
-          <a:xfrm rot="5400000">
-            <a:off x="6248068" y="4328572"/>
-            <a:ext cx="863125" cy="0"/>
-          </a:xfrm>
-          <a:prstGeom prst="straightConnector1">
-            <a:avLst/>
-          </a:prstGeom>
-          <a:ln w="57150">
-            <a:solidFill>
               <a:srgbClr val="FF0000"/>
             </a:solidFill>
-            <a:prstDash val="sysDot"/>
-            <a:headEnd type="triangle"/>
             <a:tailEnd type="triangle"/>
           </a:ln>
         </p:spPr>
@@ -6798,51 +6752,6 @@
       </p:cxnSp>
       <p:cxnSp>
         <p:nvCxnSpPr>
-          <p:cNvPr id="11" name="Connector: Elbow 10">
-            <a:extLst>
-              <a:ext uri="{FF2B5EF4-FFF2-40B4-BE49-F238E27FC236}">
-                <a16:creationId xmlns:a16="http://schemas.microsoft.com/office/drawing/2014/main" id="{57B32022-BE15-C20D-C16A-B82DB147324B}"/>
-              </a:ext>
-            </a:extLst>
-          </p:cNvPr>
-          <p:cNvCxnSpPr>
-            <a:cxnSpLocks/>
-            <a:stCxn id="42" idx="0"/>
-          </p:cNvCxnSpPr>
-          <p:nvPr/>
-        </p:nvCxnSpPr>
-        <p:spPr>
-          <a:xfrm rot="16200000" flipV="1">
-            <a:off x="1848036" y="15707"/>
-            <a:ext cx="5006393" cy="7128520"/>
-          </a:xfrm>
-          <a:prstGeom prst="bentConnector2">
-            <a:avLst/>
-          </a:prstGeom>
-          <a:ln>
-            <a:solidFill>
-              <a:srgbClr val="FF0000"/>
-            </a:solidFill>
-            <a:tailEnd type="triangle"/>
-          </a:ln>
-        </p:spPr>
-        <p:style>
-          <a:lnRef idx="2">
-            <a:schemeClr val="accent1"/>
-          </a:lnRef>
-          <a:fillRef idx="0">
-            <a:schemeClr val="accent1"/>
-          </a:fillRef>
-          <a:effectRef idx="1">
-            <a:schemeClr val="accent1"/>
-          </a:effectRef>
-          <a:fontRef idx="minor">
-            <a:schemeClr val="tx1"/>
-          </a:fontRef>
-        </p:style>
-      </p:cxnSp>
-      <p:cxnSp>
-        <p:nvCxnSpPr>
           <p:cNvPr id="47" name="Straight Arrow Connector 46">
             <a:extLst>
               <a:ext uri="{FF2B5EF4-FFF2-40B4-BE49-F238E27FC236}">
@@ -7166,6 +7075,96 @@
           <a:ln w="19050">
             <a:solidFill>
               <a:srgbClr val="00B0F0"/>
+            </a:solidFill>
+            <a:tailEnd type="triangle"/>
+          </a:ln>
+        </p:spPr>
+        <p:style>
+          <a:lnRef idx="2">
+            <a:schemeClr val="accent1"/>
+          </a:lnRef>
+          <a:fillRef idx="0">
+            <a:schemeClr val="accent1"/>
+          </a:fillRef>
+          <a:effectRef idx="1">
+            <a:schemeClr val="accent1"/>
+          </a:effectRef>
+          <a:fontRef idx="minor">
+            <a:schemeClr val="tx1"/>
+          </a:fontRef>
+        </p:style>
+      </p:cxnSp>
+      <p:cxnSp>
+        <p:nvCxnSpPr>
+          <p:cNvPr id="19" name="Straight Arrow Connector 18">
+            <a:extLst>
+              <a:ext uri="{FF2B5EF4-FFF2-40B4-BE49-F238E27FC236}">
+                <a16:creationId xmlns:a16="http://schemas.microsoft.com/office/drawing/2014/main" id="{8B1D890B-2FD2-AC6D-1926-8ACCEB2BF64E}"/>
+              </a:ext>
+            </a:extLst>
+          </p:cNvPr>
+          <p:cNvCxnSpPr>
+            <a:cxnSpLocks/>
+            <a:stCxn id="42" idx="2"/>
+          </p:cNvCxnSpPr>
+          <p:nvPr/>
+        </p:nvCxnSpPr>
+        <p:spPr>
+          <a:xfrm flipH="1">
+            <a:off x="3821802" y="1291882"/>
+            <a:ext cx="1793424" cy="388671"/>
+          </a:xfrm>
+          <a:prstGeom prst="straightConnector1">
+            <a:avLst/>
+          </a:prstGeom>
+          <a:ln w="19050">
+            <a:solidFill>
+              <a:srgbClr val="FF0000"/>
+            </a:solidFill>
+            <a:tailEnd type="triangle"/>
+          </a:ln>
+        </p:spPr>
+        <p:style>
+          <a:lnRef idx="2">
+            <a:schemeClr val="accent1"/>
+          </a:lnRef>
+          <a:fillRef idx="0">
+            <a:schemeClr val="accent1"/>
+          </a:fillRef>
+          <a:effectRef idx="1">
+            <a:schemeClr val="accent1"/>
+          </a:effectRef>
+          <a:fontRef idx="minor">
+            <a:schemeClr val="tx1"/>
+          </a:fontRef>
+        </p:style>
+      </p:cxnSp>
+      <p:cxnSp>
+        <p:nvCxnSpPr>
+          <p:cNvPr id="29" name="Straight Arrow Connector 28">
+            <a:extLst>
+              <a:ext uri="{FF2B5EF4-FFF2-40B4-BE49-F238E27FC236}">
+                <a16:creationId xmlns:a16="http://schemas.microsoft.com/office/drawing/2014/main" id="{6791A4D5-FADC-CF78-7BFE-F690A69E2C73}"/>
+              </a:ext>
+            </a:extLst>
+          </p:cNvPr>
+          <p:cNvCxnSpPr>
+            <a:cxnSpLocks/>
+            <a:stCxn id="42" idx="1"/>
+          </p:cNvCxnSpPr>
+          <p:nvPr/>
+        </p:nvCxnSpPr>
+        <p:spPr>
+          <a:xfrm flipH="1">
+            <a:off x="771525" y="968717"/>
+            <a:ext cx="3999848" cy="103945"/>
+          </a:xfrm>
+          <a:prstGeom prst="straightConnector1">
+            <a:avLst/>
+          </a:prstGeom>
+          <a:ln w="19050">
+            <a:solidFill>
+              <a:srgbClr val="FF0000"/>
             </a:solidFill>
             <a:tailEnd type="triangle"/>
           </a:ln>
@@ -8837,25 +8836,177 @@
           </a:fontRef>
         </p:style>
       </p:cxnSp>
+      <p:sp>
+        <p:nvSpPr>
+          <p:cNvPr id="1073" name="TextBox 1072">
+            <a:extLst>
+              <a:ext uri="{FF2B5EF4-FFF2-40B4-BE49-F238E27FC236}">
+                <a16:creationId xmlns:a16="http://schemas.microsoft.com/office/drawing/2014/main" id="{08054C0F-CB8A-6EC0-9715-65EDAF3EF3CD}"/>
+              </a:ext>
+            </a:extLst>
+          </p:cNvPr>
+          <p:cNvSpPr txBox="1"/>
+          <p:nvPr/>
+        </p:nvSpPr>
+        <p:spPr>
+          <a:xfrm>
+            <a:off x="405993" y="4823498"/>
+            <a:ext cx="1583546" cy="923330"/>
+          </a:xfrm>
+          <a:prstGeom prst="rect">
+            <a:avLst/>
+          </a:prstGeom>
+          <a:noFill/>
+          <a:ln w="28575">
+            <a:solidFill>
+              <a:schemeClr val="tx1"/>
+            </a:solidFill>
+          </a:ln>
+        </p:spPr>
+        <p:txBody>
+          <a:bodyPr wrap="square" rtlCol="0">
+            <a:spAutoFit/>
+          </a:bodyPr>
+          <a:lstStyle/>
+          <a:p>
+            <a:r>
+              <a:rPr lang="en-US" b="1" dirty="0"/>
+              <a:t>M</a:t>
+            </a:r>
+            <a:r>
+              <a:rPr lang="en-US" dirty="0"/>
+              <a:t>: </a:t>
+            </a:r>
+            <a:r>
+              <a:rPr lang="en-US" dirty="0" err="1"/>
+              <a:t>posizione</a:t>
+            </a:r>
+            <a:r>
+              <a:rPr lang="en-US" dirty="0"/>
+              <a:t> </a:t>
+            </a:r>
+            <a:r>
+              <a:rPr lang="en-US" dirty="0" err="1"/>
+              <a:t>della</a:t>
+            </a:r>
+            <a:r>
+              <a:rPr lang="en-US" dirty="0"/>
+              <a:t> </a:t>
+            </a:r>
+            <a:r>
+              <a:rPr lang="en-US" dirty="0" err="1"/>
+              <a:t>pinza</a:t>
+            </a:r>
+            <a:r>
+              <a:rPr lang="en-US" dirty="0"/>
+              <a:t> </a:t>
+            </a:r>
+            <a:r>
+              <a:rPr lang="en-US" dirty="0" err="1"/>
+              <a:t>nello</a:t>
+            </a:r>
+            <a:r>
+              <a:rPr lang="en-US" dirty="0"/>
+              <a:t> </a:t>
+            </a:r>
+            <a:r>
+              <a:rPr lang="en-US" dirty="0" err="1"/>
+              <a:t>spazio</a:t>
+            </a:r>
+            <a:endParaRPr lang="en-US" dirty="0"/>
+          </a:p>
+        </p:txBody>
+      </p:sp>
+      <p:sp>
+        <p:nvSpPr>
+          <p:cNvPr id="3" name="TextBox 2">
+            <a:extLst>
+              <a:ext uri="{FF2B5EF4-FFF2-40B4-BE49-F238E27FC236}">
+                <a16:creationId xmlns:a16="http://schemas.microsoft.com/office/drawing/2014/main" id="{BB53B455-1B75-19CA-4F7B-4E12A7145892}"/>
+              </a:ext>
+            </a:extLst>
+          </p:cNvPr>
+          <p:cNvSpPr txBox="1"/>
+          <p:nvPr/>
+        </p:nvSpPr>
+        <p:spPr>
+          <a:xfrm>
+            <a:off x="4771373" y="645551"/>
+            <a:ext cx="1687706" cy="646331"/>
+          </a:xfrm>
+          <a:prstGeom prst="rect">
+            <a:avLst/>
+          </a:prstGeom>
+          <a:noFill/>
+          <a:ln w="28575">
+            <a:solidFill>
+              <a:srgbClr val="FF0000"/>
+            </a:solidFill>
+          </a:ln>
+        </p:spPr>
+        <p:txBody>
+          <a:bodyPr wrap="square" rtlCol="0">
+            <a:spAutoFit/>
+          </a:bodyPr>
+          <a:lstStyle/>
+          <a:p>
+            <a:r>
+              <a:rPr lang="en-US" b="1" dirty="0" err="1"/>
+              <a:t>Motore</a:t>
+            </a:r>
+            <a:r>
+              <a:rPr lang="en-US" b="1" dirty="0"/>
+              <a:t> 6</a:t>
+            </a:r>
+            <a:r>
+              <a:rPr lang="en-US" dirty="0"/>
+              <a:t>: </a:t>
+            </a:r>
+            <a:r>
+              <a:rPr lang="en-US" dirty="0" err="1"/>
+              <a:t>apri</a:t>
+            </a:r>
+            <a:r>
+              <a:rPr lang="en-US" dirty="0"/>
+              <a:t>/</a:t>
+            </a:r>
+          </a:p>
+          <a:p>
+            <a:r>
+              <a:rPr lang="en-US" dirty="0" err="1"/>
+              <a:t>chiudi</a:t>
+            </a:r>
+            <a:r>
+              <a:rPr lang="en-US" dirty="0"/>
+              <a:t> </a:t>
+            </a:r>
+            <a:r>
+              <a:rPr lang="en-US" dirty="0" err="1"/>
+              <a:t>pinza</a:t>
+            </a:r>
+            <a:endParaRPr lang="en-US" dirty="0"/>
+          </a:p>
+        </p:txBody>
+      </p:sp>
       <p:cxnSp>
         <p:nvCxnSpPr>
-          <p:cNvPr id="1062" name="Straight Arrow Connector 1061">
-            <a:extLst>
-              <a:ext uri="{FF2B5EF4-FFF2-40B4-BE49-F238E27FC236}">
-                <a16:creationId xmlns:a16="http://schemas.microsoft.com/office/drawing/2014/main" id="{79F90042-ACDB-A056-9CC8-0592987F0D5F}"/>
+          <p:cNvPr id="5" name="Straight Arrow Connector 4">
+            <a:extLst>
+              <a:ext uri="{FF2B5EF4-FFF2-40B4-BE49-F238E27FC236}">
+                <a16:creationId xmlns:a16="http://schemas.microsoft.com/office/drawing/2014/main" id="{9309A925-EBB3-DA96-39A8-F7B409B8287B}"/>
               </a:ext>
             </a:extLst>
           </p:cNvPr>
           <p:cNvCxnSpPr>
             <a:cxnSpLocks/>
-            <a:stCxn id="1065" idx="2"/>
+            <a:stCxn id="3" idx="2"/>
           </p:cNvCxnSpPr>
           <p:nvPr/>
         </p:nvCxnSpPr>
         <p:spPr>
           <a:xfrm>
-            <a:off x="2858276" y="1357235"/>
-            <a:ext cx="653745" cy="1537816"/>
+            <a:off x="5615226" y="1291882"/>
+            <a:ext cx="1821400" cy="388671"/>
           </a:xfrm>
           <a:prstGeom prst="straightConnector1">
             <a:avLst/>
@@ -8882,96 +9033,25 @@
           </a:fontRef>
         </p:style>
       </p:cxnSp>
-      <p:sp>
-        <p:nvSpPr>
-          <p:cNvPr id="1065" name="TextBox 1064">
-            <a:extLst>
-              <a:ext uri="{FF2B5EF4-FFF2-40B4-BE49-F238E27FC236}">
-                <a16:creationId xmlns:a16="http://schemas.microsoft.com/office/drawing/2014/main" id="{3210896E-688D-D3DA-F884-3B989D558F0E}"/>
-              </a:ext>
-            </a:extLst>
-          </p:cNvPr>
-          <p:cNvSpPr txBox="1"/>
-          <p:nvPr/>
-        </p:nvSpPr>
-        <p:spPr>
-          <a:xfrm>
-            <a:off x="2014423" y="710904"/>
-            <a:ext cx="1687706" cy="646331"/>
-          </a:xfrm>
-          <a:prstGeom prst="rect">
-            <a:avLst/>
-          </a:prstGeom>
-          <a:noFill/>
-          <a:ln w="28575">
-            <a:solidFill>
-              <a:srgbClr val="FF0000"/>
-            </a:solidFill>
-          </a:ln>
-        </p:spPr>
-        <p:txBody>
-          <a:bodyPr wrap="square" rtlCol="0">
-            <a:spAutoFit/>
-          </a:bodyPr>
-          <a:lstStyle/>
-          <a:p>
-            <a:r>
-              <a:rPr lang="en-US" b="1" dirty="0" err="1"/>
-              <a:t>Motore</a:t>
-            </a:r>
-            <a:r>
-              <a:rPr lang="en-US" b="1" dirty="0"/>
-              <a:t> 6</a:t>
-            </a:r>
-            <a:r>
-              <a:rPr lang="en-US" dirty="0"/>
-              <a:t>: </a:t>
-            </a:r>
-            <a:r>
-              <a:rPr lang="en-US" dirty="0" err="1"/>
-              <a:t>apri</a:t>
-            </a:r>
-            <a:r>
-              <a:rPr lang="en-US" dirty="0"/>
-              <a:t>/</a:t>
-            </a:r>
-          </a:p>
-          <a:p>
-            <a:r>
-              <a:rPr lang="en-US" dirty="0" err="1"/>
-              <a:t>chiudi</a:t>
-            </a:r>
-            <a:r>
-              <a:rPr lang="en-US" dirty="0"/>
-              <a:t> </a:t>
-            </a:r>
-            <a:r>
-              <a:rPr lang="en-US" dirty="0" err="1"/>
-              <a:t>pinza</a:t>
-            </a:r>
-            <a:endParaRPr lang="en-US" dirty="0"/>
-          </a:p>
-        </p:txBody>
-      </p:sp>
       <p:cxnSp>
         <p:nvCxnSpPr>
-          <p:cNvPr id="1068" name="Straight Arrow Connector 1067">
-            <a:extLst>
-              <a:ext uri="{FF2B5EF4-FFF2-40B4-BE49-F238E27FC236}">
-                <a16:creationId xmlns:a16="http://schemas.microsoft.com/office/drawing/2014/main" id="{85F8A089-499D-F8CE-D980-95B3FF02CA9F}"/>
+          <p:cNvPr id="7" name="Straight Arrow Connector 6">
+            <a:extLst>
+              <a:ext uri="{FF2B5EF4-FFF2-40B4-BE49-F238E27FC236}">
+                <a16:creationId xmlns:a16="http://schemas.microsoft.com/office/drawing/2014/main" id="{42026C95-C967-5901-C270-92D0F49FEB8D}"/>
               </a:ext>
             </a:extLst>
           </p:cNvPr>
           <p:cNvCxnSpPr>
             <a:cxnSpLocks/>
-            <a:stCxn id="1065" idx="1"/>
+            <a:stCxn id="3" idx="2"/>
           </p:cNvCxnSpPr>
           <p:nvPr/>
         </p:nvCxnSpPr>
         <p:spPr>
           <a:xfrm flipH="1">
-            <a:off x="785643" y="1034070"/>
-            <a:ext cx="1228780" cy="88008"/>
+            <a:off x="3821802" y="1291882"/>
+            <a:ext cx="1793424" cy="388671"/>
           </a:xfrm>
           <a:prstGeom prst="straightConnector1">
             <a:avLst/>
@@ -8998,87 +9078,51 @@
           </a:fontRef>
         </p:style>
       </p:cxnSp>
-      <p:sp>
-        <p:nvSpPr>
-          <p:cNvPr id="1073" name="TextBox 1072">
-            <a:extLst>
-              <a:ext uri="{FF2B5EF4-FFF2-40B4-BE49-F238E27FC236}">
-                <a16:creationId xmlns:a16="http://schemas.microsoft.com/office/drawing/2014/main" id="{08054C0F-CB8A-6EC0-9715-65EDAF3EF3CD}"/>
-              </a:ext>
-            </a:extLst>
-          </p:cNvPr>
-          <p:cNvSpPr txBox="1"/>
-          <p:nvPr/>
-        </p:nvSpPr>
-        <p:spPr>
-          <a:xfrm>
-            <a:off x="405993" y="4823498"/>
-            <a:ext cx="1583546" cy="923330"/>
-          </a:xfrm>
-          <a:prstGeom prst="rect">
-            <a:avLst/>
-          </a:prstGeom>
-          <a:noFill/>
-          <a:ln w="28575">
-            <a:solidFill>
-              <a:schemeClr val="tx1"/>
-            </a:solidFill>
-          </a:ln>
-        </p:spPr>
-        <p:txBody>
-          <a:bodyPr wrap="square" rtlCol="0">
-            <a:spAutoFit/>
-          </a:bodyPr>
-          <a:lstStyle/>
-          <a:p>
-            <a:r>
-              <a:rPr lang="en-US" b="1" dirty="0"/>
-              <a:t>M</a:t>
-            </a:r>
-            <a:r>
-              <a:rPr lang="en-US" dirty="0"/>
-              <a:t>: </a:t>
-            </a:r>
-            <a:r>
-              <a:rPr lang="en-US" dirty="0" err="1"/>
-              <a:t>posizione</a:t>
-            </a:r>
-            <a:r>
-              <a:rPr lang="en-US" dirty="0"/>
-              <a:t> </a:t>
-            </a:r>
-            <a:r>
-              <a:rPr lang="en-US" dirty="0" err="1"/>
-              <a:t>della</a:t>
-            </a:r>
-            <a:r>
-              <a:rPr lang="en-US" dirty="0"/>
-              <a:t> </a:t>
-            </a:r>
-            <a:r>
-              <a:rPr lang="en-US" dirty="0" err="1"/>
-              <a:t>pinza</a:t>
-            </a:r>
-            <a:r>
-              <a:rPr lang="en-US" dirty="0"/>
-              <a:t> </a:t>
-            </a:r>
-            <a:r>
-              <a:rPr lang="en-US" dirty="0" err="1"/>
-              <a:t>nello</a:t>
-            </a:r>
-            <a:r>
-              <a:rPr lang="en-US" dirty="0"/>
-              <a:t> </a:t>
-            </a:r>
-            <a:r>
-              <a:rPr lang="en-US" dirty="0" err="1"/>
-              <a:t>spazio</a:t>
-            </a:r>
-            <a:endParaRPr lang="en-US" dirty="0"/>
-          </a:p>
-        </p:txBody>
-      </p:sp>
+      <p:cxnSp>
+        <p:nvCxnSpPr>
+          <p:cNvPr id="8" name="Straight Arrow Connector 7">
+            <a:extLst>
+              <a:ext uri="{FF2B5EF4-FFF2-40B4-BE49-F238E27FC236}">
+                <a16:creationId xmlns:a16="http://schemas.microsoft.com/office/drawing/2014/main" id="{813AD8B0-CF3E-6A03-2F1A-FBF6C74C12B5}"/>
+              </a:ext>
+            </a:extLst>
+          </p:cNvPr>
+          <p:cNvCxnSpPr>
+            <a:cxnSpLocks/>
+            <a:stCxn id="3" idx="1"/>
+          </p:cNvCxnSpPr>
+          <p:nvPr/>
+        </p:nvCxnSpPr>
+        <p:spPr>
+          <a:xfrm flipH="1">
+            <a:off x="771525" y="968717"/>
+            <a:ext cx="3999848" cy="103945"/>
+          </a:xfrm>
+          <a:prstGeom prst="straightConnector1">
+            <a:avLst/>
+          </a:prstGeom>
+          <a:ln w="19050">
+            <a:solidFill>
+              <a:srgbClr val="FF0000"/>
+            </a:solidFill>
+            <a:tailEnd type="triangle"/>
+          </a:ln>
+        </p:spPr>
+        <p:style>
+          <a:lnRef idx="2">
+            <a:schemeClr val="accent1"/>
+          </a:lnRef>
+          <a:fillRef idx="0">
+            <a:schemeClr val="accent1"/>
+          </a:fillRef>
+          <a:effectRef idx="1">
+            <a:schemeClr val="accent1"/>
+          </a:effectRef>
+          <a:fontRef idx="minor">
+            <a:schemeClr val="tx1"/>
+          </a:fontRef>
+        </p:style>
+      </p:cxnSp>
     </p:spTree>
     <p:extLst>
       <p:ext uri="{BB962C8B-B14F-4D97-AF65-F5344CB8AC3E}">
